--- a/docs/nop-bai/CUSTOS-PITCH.pptx
+++ b/docs/nop-bai/CUSTOS-PITCH.pptx
@@ -2323,7 +2323,7 @@
                 <a:ea typeface="Trebuchet MS" pitchFamily="34" charset="-122"/>
                 <a:cs typeface="Trebuchet MS" pitchFamily="34" charset="-120"/>
               </a:rPr>
-              <a:t>487</a:t>
+              <a:t>711</a:t>
             </a:r>
             <a:endParaRPr lang="en-US" sz="4400" dirty="0"/>
           </a:p>

--- a/docs/nop-bai/CUSTOS-PITCH.pptx
+++ b/docs/nop-bai/CUSTOS-PITCH.pptx
@@ -2323,7 +2323,7 @@
                 <a:ea typeface="Trebuchet MS" pitchFamily="34" charset="-122"/>
                 <a:cs typeface="Trebuchet MS" pitchFamily="34" charset="-120"/>
               </a:rPr>
-              <a:t>711</a:t>
+              <a:t>715</a:t>
             </a:r>
             <a:endParaRPr lang="en-US" sz="4400" dirty="0"/>
           </a:p>

--- a/docs/nop-bai/CUSTOS-PITCH.pptx
+++ b/docs/nop-bai/CUSTOS-PITCH.pptx
@@ -2323,7 +2323,7 @@
                 <a:ea typeface="Trebuchet MS" pitchFamily="34" charset="-122"/>
                 <a:cs typeface="Trebuchet MS" pitchFamily="34" charset="-120"/>
               </a:rPr>
-              <a:t>715</a:t>
+              <a:t>716</a:t>
             </a:r>
             <a:endParaRPr lang="en-US" sz="4400" dirty="0"/>
           </a:p>

--- a/docs/nop-bai/CUSTOS-PITCH.pptx
+++ b/docs/nop-bai/CUSTOS-PITCH.pptx
@@ -6052,7 +6052,7 @@
                 <a:ea typeface="Calibri" pitchFamily="34" charset="-122"/>
                 <a:cs typeface="Calibri" pitchFamily="34" charset="-120"/>
               </a:rPr>
-              <a:t>719 test</a:t>
+              <a:t>722 test</a:t>
             </a:r>
             <a:endParaRPr lang="en-US" sz="2200" dirty="0"/>
           </a:p>

--- a/docs/nop-bai/CUSTOS-PITCH.pptx
+++ b/docs/nop-bai/CUSTOS-PITCH.pptx
@@ -6052,7 +6052,7 @@
                 <a:ea typeface="Calibri" pitchFamily="34" charset="-122"/>
                 <a:cs typeface="Calibri" pitchFamily="34" charset="-120"/>
               </a:rPr>
-              <a:t>722 test</a:t>
+              <a:t>726 test</a:t>
             </a:r>
             <a:endParaRPr lang="en-US" sz="2200" dirty="0"/>
           </a:p>

--- a/docs/nop-bai/CUSTOS-PITCH.pptx
+++ b/docs/nop-bai/CUSTOS-PITCH.pptx
@@ -6052,7 +6052,7 @@
                 <a:ea typeface="Calibri" pitchFamily="34" charset="-122"/>
                 <a:cs typeface="Calibri" pitchFamily="34" charset="-120"/>
               </a:rPr>
-              <a:t>726 test</a:t>
+              <a:t>730 test</a:t>
             </a:r>
             <a:endParaRPr lang="en-US" sz="2200" dirty="0"/>
           </a:p>

--- a/docs/nop-bai/CUSTOS-PITCH.pptx
+++ b/docs/nop-bai/CUSTOS-PITCH.pptx
@@ -6052,7 +6052,7 @@
                 <a:ea typeface="Calibri" pitchFamily="34" charset="-122"/>
                 <a:cs typeface="Calibri" pitchFamily="34" charset="-120"/>
               </a:rPr>
-              <a:t>730 test</a:t>
+              <a:t>732 test</a:t>
             </a:r>
             <a:endParaRPr lang="en-US" sz="2200" dirty="0"/>
           </a:p>

--- a/docs/nop-bai/CUSTOS-PITCH.pptx
+++ b/docs/nop-bai/CUSTOS-PITCH.pptx
@@ -6052,7 +6052,7 @@
                 <a:ea typeface="Calibri" pitchFamily="34" charset="-122"/>
                 <a:cs typeface="Calibri" pitchFamily="34" charset="-120"/>
               </a:rPr>
-              <a:t>732 test</a:t>
+              <a:t>740 test</a:t>
             </a:r>
             <a:endParaRPr lang="en-US" sz="2200" dirty="0"/>
           </a:p>

--- a/docs/nop-bai/CUSTOS-PITCH.pptx
+++ b/docs/nop-bai/CUSTOS-PITCH.pptx
@@ -6052,7 +6052,7 @@
                 <a:ea typeface="Calibri" pitchFamily="34" charset="-122"/>
                 <a:cs typeface="Calibri" pitchFamily="34" charset="-120"/>
               </a:rPr>
-              <a:t>740 test</a:t>
+              <a:t>749 test</a:t>
             </a:r>
             <a:endParaRPr lang="en-US" sz="2200" dirty="0"/>
           </a:p>

--- a/docs/nop-bai/CUSTOS-PITCH.pptx
+++ b/docs/nop-bai/CUSTOS-PITCH.pptx
@@ -6052,7 +6052,7 @@
                 <a:ea typeface="Calibri" pitchFamily="34" charset="-122"/>
                 <a:cs typeface="Calibri" pitchFamily="34" charset="-120"/>
               </a:rPr>
-              <a:t>749 test</a:t>
+              <a:t>763 test</a:t>
             </a:r>
             <a:endParaRPr lang="en-US" sz="2200" dirty="0"/>
           </a:p>

--- a/docs/nop-bai/CUSTOS-PITCH.pptx
+++ b/docs/nop-bai/CUSTOS-PITCH.pptx
@@ -6052,7 +6052,7 @@
                 <a:ea typeface="Calibri" pitchFamily="34" charset="-122"/>
                 <a:cs typeface="Calibri" pitchFamily="34" charset="-120"/>
               </a:rPr>
-              <a:t>763 test</a:t>
+              <a:t>775 test</a:t>
             </a:r>
             <a:endParaRPr lang="en-US" sz="2200" dirty="0"/>
           </a:p>

--- a/docs/nop-bai/CUSTOS-PITCH.pptx
+++ b/docs/nop-bai/CUSTOS-PITCH.pptx
@@ -6052,7 +6052,7 @@
                 <a:ea typeface="Calibri" pitchFamily="34" charset="-122"/>
                 <a:cs typeface="Calibri" pitchFamily="34" charset="-120"/>
               </a:rPr>
-              <a:t>775 test</a:t>
+              <a:t>783 test</a:t>
             </a:r>
             <a:endParaRPr lang="en-US" sz="2200" dirty="0"/>
           </a:p>

--- a/docs/nop-bai/CUSTOS-PITCH.pptx
+++ b/docs/nop-bai/CUSTOS-PITCH.pptx
@@ -6052,7 +6052,7 @@
                 <a:ea typeface="Calibri" pitchFamily="34" charset="-122"/>
                 <a:cs typeface="Calibri" pitchFamily="34" charset="-120"/>
               </a:rPr>
-              <a:t>783 test</a:t>
+              <a:t>791 test</a:t>
             </a:r>
             <a:endParaRPr lang="en-US" sz="2200" dirty="0"/>
           </a:p>

--- a/docs/nop-bai/CUSTOS-PITCH.pptx
+++ b/docs/nop-bai/CUSTOS-PITCH.pptx
@@ -6052,7 +6052,7 @@
                 <a:ea typeface="Calibri" pitchFamily="34" charset="-122"/>
                 <a:cs typeface="Calibri" pitchFamily="34" charset="-120"/>
               </a:rPr>
-              <a:t>791 test</a:t>
+              <a:t>799 test</a:t>
             </a:r>
             <a:endParaRPr lang="en-US" sz="2200" dirty="0"/>
           </a:p>

--- a/docs/nop-bai/CUSTOS-PITCH.pptx
+++ b/docs/nop-bai/CUSTOS-PITCH.pptx
@@ -6052,7 +6052,7 @@
                 <a:ea typeface="Calibri" pitchFamily="34" charset="-122"/>
                 <a:cs typeface="Calibri" pitchFamily="34" charset="-120"/>
               </a:rPr>
-              <a:t>799 test</a:t>
+              <a:t>808 test</a:t>
             </a:r>
             <a:endParaRPr lang="en-US" sz="2200" dirty="0"/>
           </a:p>

--- a/docs/nop-bai/CUSTOS-PITCH.pptx
+++ b/docs/nop-bai/CUSTOS-PITCH.pptx
@@ -6052,7 +6052,7 @@
                 <a:ea typeface="Calibri" pitchFamily="34" charset="-122"/>
                 <a:cs typeface="Calibri" pitchFamily="34" charset="-120"/>
               </a:rPr>
-              <a:t>808 test</a:t>
+              <a:t>816 test</a:t>
             </a:r>
             <a:endParaRPr lang="en-US" sz="2200" dirty="0"/>
           </a:p>

--- a/docs/nop-bai/CUSTOS-PITCH.pptx
+++ b/docs/nop-bai/CUSTOS-PITCH.pptx
@@ -6052,7 +6052,7 @@
                 <a:ea typeface="Calibri" pitchFamily="34" charset="-122"/>
                 <a:cs typeface="Calibri" pitchFamily="34" charset="-120"/>
               </a:rPr>
-              <a:t>816 test</a:t>
+              <a:t>824 test</a:t>
             </a:r>
             <a:endParaRPr lang="en-US" sz="2200" dirty="0"/>
           </a:p>

--- a/docs/nop-bai/CUSTOS-PITCH.pptx
+++ b/docs/nop-bai/CUSTOS-PITCH.pptx
@@ -6052,7 +6052,7 @@
                 <a:ea typeface="Calibri" pitchFamily="34" charset="-122"/>
                 <a:cs typeface="Calibri" pitchFamily="34" charset="-120"/>
               </a:rPr>
-              <a:t>824 test</a:t>
+              <a:t>828 test</a:t>
             </a:r>
             <a:endParaRPr lang="en-US" sz="2200" dirty="0"/>
           </a:p>

--- a/docs/nop-bai/CUSTOS-PITCH.pptx
+++ b/docs/nop-bai/CUSTOS-PITCH.pptx
@@ -6052,7 +6052,7 @@
                 <a:ea typeface="Calibri" pitchFamily="34" charset="-122"/>
                 <a:cs typeface="Calibri" pitchFamily="34" charset="-120"/>
               </a:rPr>
-              <a:t>828 test</a:t>
+              <a:t>840 test</a:t>
             </a:r>
             <a:endParaRPr lang="en-US" sz="2200" dirty="0"/>
           </a:p>

--- a/docs/nop-bai/CUSTOS-PITCH.pptx
+++ b/docs/nop-bai/CUSTOS-PITCH.pptx
@@ -6052,7 +6052,7 @@
                 <a:ea typeface="Calibri" pitchFamily="34" charset="-122"/>
                 <a:cs typeface="Calibri" pitchFamily="34" charset="-120"/>
               </a:rPr>
-              <a:t>840 test</a:t>
+              <a:t>843 test</a:t>
             </a:r>
             <a:endParaRPr lang="en-US" sz="2200" dirty="0"/>
           </a:p>

--- a/docs/nop-bai/CUSTOS-PITCH.pptx
+++ b/docs/nop-bai/CUSTOS-PITCH.pptx
@@ -6052,7 +6052,7 @@
                 <a:ea typeface="Calibri" pitchFamily="34" charset="-122"/>
                 <a:cs typeface="Calibri" pitchFamily="34" charset="-120"/>
               </a:rPr>
-              <a:t>843 test</a:t>
+              <a:t>862 test</a:t>
             </a:r>
             <a:endParaRPr lang="en-US" sz="2200" dirty="0"/>
           </a:p>

--- a/docs/nop-bai/CUSTOS-PITCH.pptx
+++ b/docs/nop-bai/CUSTOS-PITCH.pptx
@@ -6052,7 +6052,7 @@
                 <a:ea typeface="Calibri" pitchFamily="34" charset="-122"/>
                 <a:cs typeface="Calibri" pitchFamily="34" charset="-120"/>
               </a:rPr>
-              <a:t>862 test</a:t>
+              <a:t>872 test</a:t>
             </a:r>
             <a:endParaRPr lang="en-US" sz="2200" dirty="0"/>
           </a:p>

--- a/docs/nop-bai/CUSTOS-PITCH.pptx
+++ b/docs/nop-bai/CUSTOS-PITCH.pptx
@@ -6052,7 +6052,7 @@
                 <a:ea typeface="Calibri" pitchFamily="34" charset="-122"/>
                 <a:cs typeface="Calibri" pitchFamily="34" charset="-120"/>
               </a:rPr>
-              <a:t>872 test</a:t>
+              <a:t>888 test</a:t>
             </a:r>
             <a:endParaRPr lang="en-US" sz="2200" dirty="0"/>
           </a:p>

--- a/docs/nop-bai/CUSTOS-PITCH.pptx
+++ b/docs/nop-bai/CUSTOS-PITCH.pptx
@@ -6052,7 +6052,7 @@
                 <a:ea typeface="Calibri" pitchFamily="34" charset="-122"/>
                 <a:cs typeface="Calibri" pitchFamily="34" charset="-120"/>
               </a:rPr>
-              <a:t>888 test</a:t>
+              <a:t>901 test</a:t>
             </a:r>
             <a:endParaRPr lang="en-US" sz="2200" dirty="0"/>
           </a:p>

--- a/docs/nop-bai/CUSTOS-PITCH.pptx
+++ b/docs/nop-bai/CUSTOS-PITCH.pptx
@@ -6052,7 +6052,7 @@
                 <a:ea typeface="Calibri" pitchFamily="34" charset="-122"/>
                 <a:cs typeface="Calibri" pitchFamily="34" charset="-120"/>
               </a:rPr>
-              <a:t>901 test</a:t>
+              <a:t>910 test</a:t>
             </a:r>
             <a:endParaRPr lang="en-US" sz="2200" dirty="0"/>
           </a:p>

--- a/docs/nop-bai/CUSTOS-PITCH.pptx
+++ b/docs/nop-bai/CUSTOS-PITCH.pptx
@@ -6052,7 +6052,7 @@
                 <a:ea typeface="Calibri" pitchFamily="34" charset="-122"/>
                 <a:cs typeface="Calibri" pitchFamily="34" charset="-120"/>
               </a:rPr>
-              <a:t>910 test</a:t>
+              <a:t>924 test</a:t>
             </a:r>
             <a:endParaRPr lang="en-US" sz="2200" dirty="0"/>
           </a:p>

--- a/docs/nop-bai/CUSTOS-PITCH.pptx
+++ b/docs/nop-bai/CUSTOS-PITCH.pptx
@@ -6052,7 +6052,7 @@
                 <a:ea typeface="Calibri" pitchFamily="34" charset="-122"/>
                 <a:cs typeface="Calibri" pitchFamily="34" charset="-120"/>
               </a:rPr>
-              <a:t>924 test</a:t>
+              <a:t>934 test</a:t>
             </a:r>
             <a:endParaRPr lang="en-US" sz="2200" dirty="0"/>
           </a:p>

--- a/docs/nop-bai/CUSTOS-PITCH.pptx
+++ b/docs/nop-bai/CUSTOS-PITCH.pptx
@@ -6052,7 +6052,7 @@
                 <a:ea typeface="Calibri" pitchFamily="34" charset="-122"/>
                 <a:cs typeface="Calibri" pitchFamily="34" charset="-120"/>
               </a:rPr>
-              <a:t>934 test</a:t>
+              <a:t>944 test</a:t>
             </a:r>
             <a:endParaRPr lang="en-US" sz="2200" dirty="0"/>
           </a:p>

--- a/docs/nop-bai/CUSTOS-PITCH.pptx
+++ b/docs/nop-bai/CUSTOS-PITCH.pptx
@@ -6052,7 +6052,7 @@
                 <a:ea typeface="Calibri" pitchFamily="34" charset="-122"/>
                 <a:cs typeface="Calibri" pitchFamily="34" charset="-120"/>
               </a:rPr>
-              <a:t>944 test</a:t>
+              <a:t>949 test</a:t>
             </a:r>
             <a:endParaRPr lang="en-US" sz="2200" dirty="0"/>
           </a:p>

--- a/docs/nop-bai/CUSTOS-PITCH.pptx
+++ b/docs/nop-bai/CUSTOS-PITCH.pptx
@@ -6052,7 +6052,7 @@
                 <a:ea typeface="Calibri" pitchFamily="34" charset="-122"/>
                 <a:cs typeface="Calibri" pitchFamily="34" charset="-120"/>
               </a:rPr>
-              <a:t>949 test</a:t>
+              <a:t>953 test</a:t>
             </a:r>
             <a:endParaRPr lang="en-US" sz="2200" dirty="0"/>
           </a:p>

--- a/docs/nop-bai/CUSTOS-PITCH.pptx
+++ b/docs/nop-bai/CUSTOS-PITCH.pptx
@@ -6052,7 +6052,7 @@
                 <a:ea typeface="Calibri" pitchFamily="34" charset="-122"/>
                 <a:cs typeface="Calibri" pitchFamily="34" charset="-120"/>
               </a:rPr>
-              <a:t>953 test</a:t>
+              <a:t>968 test</a:t>
             </a:r>
             <a:endParaRPr lang="en-US" sz="2200" dirty="0"/>
           </a:p>

--- a/docs/nop-bai/CUSTOS-PITCH.pptx
+++ b/docs/nop-bai/CUSTOS-PITCH.pptx
@@ -6052,7 +6052,7 @@
                 <a:ea typeface="Calibri" pitchFamily="34" charset="-122"/>
                 <a:cs typeface="Calibri" pitchFamily="34" charset="-120"/>
               </a:rPr>
-              <a:t>968 test</a:t>
+              <a:t>1004 test</a:t>
             </a:r>
             <a:endParaRPr lang="en-US" sz="2200" dirty="0"/>
           </a:p>

--- a/docs/nop-bai/CUSTOS-PITCH.pptx
+++ b/docs/nop-bai/CUSTOS-PITCH.pptx
@@ -6052,7 +6052,7 @@
                 <a:ea typeface="Calibri" pitchFamily="34" charset="-122"/>
                 <a:cs typeface="Calibri" pitchFamily="34" charset="-120"/>
               </a:rPr>
-              <a:t>1004 test</a:t>
+              <a:t>1042 test</a:t>
             </a:r>
             <a:endParaRPr lang="en-US" sz="2200" dirty="0"/>
           </a:p>

--- a/docs/nop-bai/CUSTOS-PITCH.pptx
+++ b/docs/nop-bai/CUSTOS-PITCH.pptx
@@ -6052,7 +6052,7 @@
                 <a:ea typeface="Calibri" pitchFamily="34" charset="-122"/>
                 <a:cs typeface="Calibri" pitchFamily="34" charset="-120"/>
               </a:rPr>
-              <a:t>1042 test</a:t>
+              <a:t>1136 test</a:t>
             </a:r>
             <a:endParaRPr lang="en-US" sz="2200" dirty="0"/>
           </a:p>
